--- a/linear-algebra/matrix-form/MatrixForm.pptx
+++ b/linear-algebra/matrix-form/MatrixForm.pptx
@@ -112,6 +112,11 @@
       </a:defRPr>
     </a:lvl9pPr>
   </p:defaultTextStyle>
+  <p:extLst>
+    <p:ext uri="{EFAFB233-063F-42B5-8137-9DF3F51BA10A}">
+      <p15:sldGuideLst xmlns:p15="http://schemas.microsoft.com/office/powerpoint/2012/main"/>
+    </p:ext>
+  </p:extLst>
 </p:presentation>
 </file>
 
@@ -262,7 +267,7 @@
           <a:p>
             <a:fld id="{510AA2A0-B57A-41DF-AD18-CEF093072E31}" type="datetimeFigureOut">
               <a:rPr lang="nl-NL" smtClean="0"/>
-              <a:t>19-9-2026</a:t>
+              <a:t>20-9-2026</a:t>
             </a:fld>
             <a:endParaRPr lang="nl-NL"/>
           </a:p>
@@ -460,7 +465,7 @@
           <a:p>
             <a:fld id="{510AA2A0-B57A-41DF-AD18-CEF093072E31}" type="datetimeFigureOut">
               <a:rPr lang="nl-NL" smtClean="0"/>
-              <a:t>19-9-2026</a:t>
+              <a:t>20-9-2026</a:t>
             </a:fld>
             <a:endParaRPr lang="nl-NL"/>
           </a:p>
@@ -668,7 +673,7 @@
           <a:p>
             <a:fld id="{510AA2A0-B57A-41DF-AD18-CEF093072E31}" type="datetimeFigureOut">
               <a:rPr lang="nl-NL" smtClean="0"/>
-              <a:t>19-9-2026</a:t>
+              <a:t>20-9-2026</a:t>
             </a:fld>
             <a:endParaRPr lang="nl-NL"/>
           </a:p>
@@ -866,7 +871,7 @@
           <a:p>
             <a:fld id="{510AA2A0-B57A-41DF-AD18-CEF093072E31}" type="datetimeFigureOut">
               <a:rPr lang="nl-NL" smtClean="0"/>
-              <a:t>19-9-2026</a:t>
+              <a:t>20-9-2026</a:t>
             </a:fld>
             <a:endParaRPr lang="nl-NL"/>
           </a:p>
@@ -1141,7 +1146,7 @@
           <a:p>
             <a:fld id="{510AA2A0-B57A-41DF-AD18-CEF093072E31}" type="datetimeFigureOut">
               <a:rPr lang="nl-NL" smtClean="0"/>
-              <a:t>19-9-2026</a:t>
+              <a:t>20-9-2026</a:t>
             </a:fld>
             <a:endParaRPr lang="nl-NL"/>
           </a:p>
@@ -1406,7 +1411,7 @@
           <a:p>
             <a:fld id="{510AA2A0-B57A-41DF-AD18-CEF093072E31}" type="datetimeFigureOut">
               <a:rPr lang="nl-NL" smtClean="0"/>
-              <a:t>19-9-2026</a:t>
+              <a:t>20-9-2026</a:t>
             </a:fld>
             <a:endParaRPr lang="nl-NL"/>
           </a:p>
@@ -1818,7 +1823,7 @@
           <a:p>
             <a:fld id="{510AA2A0-B57A-41DF-AD18-CEF093072E31}" type="datetimeFigureOut">
               <a:rPr lang="nl-NL" smtClean="0"/>
-              <a:t>19-9-2026</a:t>
+              <a:t>20-9-2026</a:t>
             </a:fld>
             <a:endParaRPr lang="nl-NL"/>
           </a:p>
@@ -1959,7 +1964,7 @@
           <a:p>
             <a:fld id="{510AA2A0-B57A-41DF-AD18-CEF093072E31}" type="datetimeFigureOut">
               <a:rPr lang="nl-NL" smtClean="0"/>
-              <a:t>19-9-2026</a:t>
+              <a:t>20-9-2026</a:t>
             </a:fld>
             <a:endParaRPr lang="nl-NL"/>
           </a:p>
@@ -2072,7 +2077,7 @@
           <a:p>
             <a:fld id="{510AA2A0-B57A-41DF-AD18-CEF093072E31}" type="datetimeFigureOut">
               <a:rPr lang="nl-NL" smtClean="0"/>
-              <a:t>19-9-2026</a:t>
+              <a:t>20-9-2026</a:t>
             </a:fld>
             <a:endParaRPr lang="nl-NL"/>
           </a:p>
@@ -2383,7 +2388,7 @@
           <a:p>
             <a:fld id="{510AA2A0-B57A-41DF-AD18-CEF093072E31}" type="datetimeFigureOut">
               <a:rPr lang="nl-NL" smtClean="0"/>
-              <a:t>19-9-2026</a:t>
+              <a:t>20-9-2026</a:t>
             </a:fld>
             <a:endParaRPr lang="nl-NL"/>
           </a:p>
@@ -2671,7 +2676,7 @@
           <a:p>
             <a:fld id="{510AA2A0-B57A-41DF-AD18-CEF093072E31}" type="datetimeFigureOut">
               <a:rPr lang="nl-NL" smtClean="0"/>
-              <a:t>19-9-2026</a:t>
+              <a:t>20-9-2026</a:t>
             </a:fld>
             <a:endParaRPr lang="nl-NL"/>
           </a:p>
@@ -2912,7 +2917,7 @@
           <a:p>
             <a:fld id="{510AA2A0-B57A-41DF-AD18-CEF093072E31}" type="datetimeFigureOut">
               <a:rPr lang="nl-NL" smtClean="0"/>
-              <a:t>19-9-2026</a:t>
+              <a:t>20-9-2026</a:t>
             </a:fld>
             <a:endParaRPr lang="nl-NL"/>
           </a:p>
@@ -3828,21 +3833,20 @@
       </p:grpSpPr>
       <p:pic>
         <p:nvPicPr>
-          <p:cNvPr id="3" name="Afbeelding 2" descr="Schermopname (1149)">
-            <a:extLst>
-              <a:ext uri="{FF2B5EF4-FFF2-40B4-BE49-F238E27FC236}">
-                <a16:creationId xmlns:a16="http://schemas.microsoft.com/office/drawing/2014/main" id="{C3D9FC72-6166-E6A9-4FAE-DCF491D2F4E0}"/>
+          <p:cNvPr id="4" name="Afbeelding 3">
+            <a:extLst>
+              <a:ext uri="{FF2B5EF4-FFF2-40B4-BE49-F238E27FC236}">
+                <a16:creationId xmlns:a16="http://schemas.microsoft.com/office/drawing/2014/main" id="{386603F5-4D48-2254-C359-06A70EA93478}"/>
               </a:ext>
             </a:extLst>
           </p:cNvPr>
           <p:cNvPicPr>
-            <a:picLocks noGrp="1" noChangeAspect="1"/>
+            <a:picLocks noChangeAspect="1"/>
           </p:cNvPicPr>
-          <p:nvPr isPhoto="1"/>
+          <p:nvPr/>
         </p:nvPicPr>
         <p:blipFill>
           <a:blip r:embed="rId2">
-            <a:lum/>
             <a:extLst>
               <a:ext uri="{28A0092B-C50C-407E-A947-70E740481C1C}">
                 <a14:useLocalDpi xmlns:a14="http://schemas.microsoft.com/office/drawing/2010/main" val="0"/>
@@ -3855,8 +3859,8 @@
         </p:blipFill>
         <p:spPr>
           <a:xfrm>
-            <a:off x="0" y="615950"/>
-            <a:ext cx="12192000" cy="5626100"/>
+            <a:off x="0" y="678805"/>
+            <a:ext cx="12192000" cy="5500390"/>
           </a:xfrm>
           <a:prstGeom prst="rect">
             <a:avLst/>
